--- a/figures/ppt/技术耦合.pptx
+++ b/figures/ppt/技术耦合.pptx
@@ -112,7 +112,7 @@
             <a:srgbClr val="A4A3A4"/>
           </p15:clr>
         </p15:guide>
-        <p15:guide id="2" pos="3745" userDrawn="1">
+        <p15:guide id="2" pos="3728" userDrawn="1">
           <p15:clr>
             <a:srgbClr val="A4A3A4"/>
           </p15:clr>
@@ -3237,7 +3237,7 @@
         </p:nvSpPr>
         <p:spPr>
           <a:xfrm>
-            <a:off x="3796030" y="619125"/>
+            <a:off x="3530600" y="486410"/>
             <a:ext cx="1636395" cy="706755"/>
           </a:xfrm>
           <a:prstGeom prst="rect">
@@ -3377,8 +3377,8 @@
         </p:nvSpPr>
         <p:spPr>
           <a:xfrm>
-            <a:off x="1484630" y="4271645"/>
-            <a:ext cx="2221230" cy="2437130"/>
+            <a:off x="1528445" y="4458335"/>
+            <a:ext cx="2001520" cy="2250440"/>
           </a:xfrm>
           <a:prstGeom prst="rect">
             <a:avLst/>
@@ -3468,9 +3468,9 @@
         <p:grpSpPr>
           <a:xfrm>
             <a:off x="-6985" y="4364355"/>
-            <a:ext cx="792480" cy="1104900"/>
+            <a:ext cx="806450" cy="1104900"/>
             <a:chOff x="102" y="5898"/>
-            <a:chExt cx="1248" cy="1740"/>
+            <a:chExt cx="1270" cy="1740"/>
           </a:xfrm>
         </p:grpSpPr>
         <p:sp>
@@ -3510,7 +3510,7 @@
           </p:nvSpPr>
           <p:spPr>
             <a:xfrm>
-              <a:off x="102" y="6478"/>
+              <a:off x="124" y="6478"/>
               <a:ext cx="1248" cy="580"/>
             </a:xfrm>
             <a:prstGeom prst="rect">
@@ -3539,7 +3539,7 @@
           </p:nvSpPr>
           <p:spPr>
             <a:xfrm>
-              <a:off x="102" y="7058"/>
+              <a:off x="113" y="7058"/>
               <a:ext cx="1248" cy="580"/>
             </a:xfrm>
             <a:prstGeom prst="rect">
@@ -3644,7 +3644,7 @@
         </p:nvSpPr>
         <p:spPr>
           <a:xfrm>
-            <a:off x="5877560" y="619125"/>
+            <a:off x="5612130" y="486410"/>
             <a:ext cx="1636395" cy="706755"/>
           </a:xfrm>
           <a:prstGeom prst="rect">
@@ -3753,7 +3753,7 @@
         </p:nvSpPr>
         <p:spPr>
           <a:xfrm>
-            <a:off x="11588750" y="4641215"/>
+            <a:off x="11532870" y="4641215"/>
             <a:ext cx="819785" cy="645160"/>
           </a:xfrm>
           <a:prstGeom prst="rect">
@@ -3789,8 +3789,8 @@
         </p:nvSpPr>
         <p:spPr>
           <a:xfrm>
-            <a:off x="5946140" y="4732655"/>
-            <a:ext cx="1536700" cy="368300"/>
+            <a:off x="5631180" y="4732655"/>
+            <a:ext cx="1882775" cy="368300"/>
           </a:xfrm>
           <a:prstGeom prst="rect">
             <a:avLst/>
@@ -3804,7 +3804,7 @@
           <a:p>
             <a:r>
               <a:rPr lang="zh-CN" altLang="en-US"/>
-              <a:t>路由</a:t>
+              <a:t>星间路由</a:t>
             </a:r>
             <a:r>
               <a:rPr lang="zh-CN" altLang="en-US"/>
@@ -4532,8 +4532,8 @@
         </p:nvSpPr>
         <p:spPr>
           <a:xfrm>
-            <a:off x="8681085" y="4271645"/>
-            <a:ext cx="2221230" cy="2437130"/>
+            <a:off x="8867775" y="4458335"/>
+            <a:ext cx="2047875" cy="2250440"/>
           </a:xfrm>
           <a:prstGeom prst="rect">
             <a:avLst/>
@@ -4578,7 +4578,7 @@
         </p:nvSpPr>
         <p:spPr>
           <a:xfrm>
-            <a:off x="9036050" y="6360160"/>
+            <a:off x="9100185" y="6357620"/>
             <a:ext cx="1491615" cy="368300"/>
           </a:xfrm>
           <a:prstGeom prst="rect">
@@ -4608,7 +4608,7 @@
         </p:nvSpPr>
         <p:spPr>
           <a:xfrm>
-            <a:off x="7959090" y="619125"/>
+            <a:off x="7693660" y="486410"/>
             <a:ext cx="1636395" cy="706755"/>
           </a:xfrm>
           <a:prstGeom prst="rect">
@@ -4717,8 +4717,8 @@
         </p:nvSpPr>
         <p:spPr>
           <a:xfrm>
-            <a:off x="4628515" y="5712460"/>
-            <a:ext cx="3404870" cy="645160"/>
+            <a:off x="4631690" y="5691505"/>
+            <a:ext cx="3080385" cy="645160"/>
           </a:xfrm>
           <a:prstGeom prst="rect">
             <a:avLst/>
@@ -4790,7 +4790,7 @@
         </p:nvSpPr>
         <p:spPr>
           <a:xfrm>
-            <a:off x="4755515" y="3805555"/>
+            <a:off x="4692650" y="3805555"/>
             <a:ext cx="3404870" cy="645160"/>
           </a:xfrm>
           <a:prstGeom prst="rect">
@@ -4875,7 +4875,7 @@
         </p:nvSpPr>
         <p:spPr>
           <a:xfrm>
-            <a:off x="4766310" y="2611120"/>
+            <a:off x="4794250" y="2611120"/>
             <a:ext cx="3481070" cy="645160"/>
           </a:xfrm>
           <a:prstGeom prst="rect">
@@ -5299,6 +5299,108 @@
               <a:t>监控</a:t>
             </a:r>
             <a:endParaRPr lang="zh-CN" altLang="en-US"/>
+          </a:p>
+        </p:txBody>
+      </p:sp>
+      <p:sp>
+        <p:nvSpPr>
+          <p:cNvPr id="7" name="文本框 6"/>
+          <p:cNvSpPr txBox="1"/>
+          <p:nvPr/>
+        </p:nvSpPr>
+        <p:spPr>
+          <a:xfrm>
+            <a:off x="7838440" y="1158240"/>
+            <a:ext cx="1491615" cy="306705"/>
+          </a:xfrm>
+          <a:prstGeom prst="rect">
+            <a:avLst/>
+          </a:prstGeom>
+          <a:noFill/>
+        </p:spPr>
+        <p:txBody>
+          <a:bodyPr wrap="square" rtlCol="0">
+            <a:spAutoFit/>
+          </a:bodyPr>
+          <a:p>
+            <a:pPr algn="ctr"/>
+            <a:r>
+              <a:rPr lang="zh-CN" altLang="en-US" sz="1400"/>
+              <a:t>切片</a:t>
+            </a:r>
+            <a:r>
+              <a:rPr lang="zh-CN" altLang="en-US" sz="1400"/>
+              <a:t>调度器</a:t>
+            </a:r>
+            <a:endParaRPr lang="zh-CN" altLang="en-US" sz="1400"/>
+          </a:p>
+        </p:txBody>
+      </p:sp>
+      <p:sp>
+        <p:nvSpPr>
+          <p:cNvPr id="9" name="文本框 8"/>
+          <p:cNvSpPr txBox="1"/>
+          <p:nvPr/>
+        </p:nvSpPr>
+        <p:spPr>
+          <a:xfrm>
+            <a:off x="5763895" y="1165225"/>
+            <a:ext cx="1491615" cy="306705"/>
+          </a:xfrm>
+          <a:prstGeom prst="rect">
+            <a:avLst/>
+          </a:prstGeom>
+          <a:noFill/>
+        </p:spPr>
+        <p:txBody>
+          <a:bodyPr wrap="square" rtlCol="0">
+            <a:spAutoFit/>
+          </a:bodyPr>
+          <a:p>
+            <a:pPr algn="ctr"/>
+            <a:r>
+              <a:rPr lang="zh-CN" altLang="en-US" sz="1400"/>
+              <a:t>路由控制</a:t>
+            </a:r>
+            <a:r>
+              <a:rPr lang="zh-CN" altLang="en-US" sz="1400"/>
+              <a:t>面</a:t>
+            </a:r>
+            <a:endParaRPr lang="zh-CN" altLang="en-US" sz="1400"/>
+          </a:p>
+        </p:txBody>
+      </p:sp>
+      <p:sp>
+        <p:nvSpPr>
+          <p:cNvPr id="16" name="文本框 15"/>
+          <p:cNvSpPr txBox="1"/>
+          <p:nvPr/>
+        </p:nvSpPr>
+        <p:spPr>
+          <a:xfrm>
+            <a:off x="3602990" y="1168400"/>
+            <a:ext cx="1491615" cy="306705"/>
+          </a:xfrm>
+          <a:prstGeom prst="rect">
+            <a:avLst/>
+          </a:prstGeom>
+          <a:noFill/>
+        </p:spPr>
+        <p:txBody>
+          <a:bodyPr wrap="square" rtlCol="0">
+            <a:spAutoFit/>
+          </a:bodyPr>
+          <a:p>
+            <a:pPr algn="ctr"/>
+            <a:r>
+              <a:rPr lang="zh-CN" altLang="en-US" sz="1400"/>
+              <a:t>切换控制</a:t>
+            </a:r>
+            <a:r>
+              <a:rPr lang="zh-CN" altLang="en-US" sz="1400"/>
+              <a:t>器</a:t>
+            </a:r>
+            <a:endParaRPr lang="zh-CN" altLang="en-US" sz="1400"/>
           </a:p>
         </p:txBody>
       </p:sp>

--- a/figures/ppt/技术耦合.pptx
+++ b/figures/ppt/技术耦合.pptx
@@ -107,12 +107,12 @@
   <p:extLst>
     <p:ext uri="{EFAFB233-063F-42B5-8137-9DF3F51BA10A}">
       <p15:sldGuideLst xmlns:p15="http://schemas.microsoft.com/office/powerpoint/2012/main">
-        <p15:guide id="1" orient="horz" pos="2190" userDrawn="1">
+        <p15:guide id="1" orient="horz" pos="2225" userDrawn="1">
           <p15:clr>
             <a:srgbClr val="A4A3A4"/>
           </p15:clr>
         </p15:guide>
-        <p15:guide id="2" pos="3728" userDrawn="1">
+        <p15:guide id="2" pos="3729" userDrawn="1">
           <p15:clr>
             <a:srgbClr val="A4A3A4"/>
           </p15:clr>
@@ -3141,7 +3141,7 @@
                   <a:schemeClr val="tx1"/>
                 </a:solidFill>
               </a:rPr>
-              <a:t>信源信道</a:t>
+              <a:t>轻量化</a:t>
             </a:r>
             <a:r>
               <a:rPr lang="zh-CN" altLang="en-US">
@@ -3149,7 +3149,23 @@
                   <a:schemeClr val="tx1"/>
                 </a:solidFill>
               </a:rPr>
-              <a:t>联合编码器</a:t>
+              <a:t>语义</a:t>
+            </a:r>
+            <a:endParaRPr lang="zh-CN" altLang="en-US">
+              <a:solidFill>
+                <a:schemeClr val="tx1"/>
+              </a:solidFill>
+            </a:endParaRPr>
+          </a:p>
+          <a:p>
+            <a:pPr algn="ctr"/>
+            <a:r>
+              <a:rPr lang="zh-CN" altLang="en-US">
+                <a:solidFill>
+                  <a:schemeClr val="tx1"/>
+                </a:solidFill>
+              </a:rPr>
+              <a:t>编码器</a:t>
             </a:r>
             <a:endParaRPr lang="zh-CN" altLang="en-US">
               <a:solidFill>
@@ -3467,10 +3483,10 @@
         </p:nvGrpSpPr>
         <p:grpSpPr>
           <a:xfrm>
-            <a:off x="-6985" y="4364355"/>
-            <a:ext cx="806450" cy="1104900"/>
+            <a:off x="100965" y="4357370"/>
+            <a:ext cx="923925" cy="1209675"/>
             <a:chOff x="102" y="5898"/>
-            <a:chExt cx="1270" cy="1740"/>
+            <a:chExt cx="1455" cy="1905"/>
           </a:xfrm>
         </p:grpSpPr>
         <p:sp>
@@ -3482,7 +3498,7 @@
           <p:spPr>
             <a:xfrm>
               <a:off x="102" y="5898"/>
-              <a:ext cx="1248" cy="580"/>
+              <a:ext cx="1455" cy="1016"/>
             </a:xfrm>
             <a:prstGeom prst="rect">
               <a:avLst/>
@@ -3493,6 +3509,17 @@
             <a:bodyPr wrap="square" rtlCol="0">
               <a:spAutoFit/>
             </a:bodyPr>
+            <a:p>
+              <a:r>
+                <a:rPr lang="zh-CN" altLang="en-US" b="1"/>
+                <a:t>业务流</a:t>
+              </a:r>
+              <a:r>
+                <a:rPr lang="zh-CN" altLang="en-US"/>
+                <a:t>：</a:t>
+              </a:r>
+              <a:endParaRPr lang="en-US" altLang="zh-CN"/>
+            </a:p>
             <a:p>
               <a:r>
                 <a:rPr lang="en-US" altLang="zh-CN"/>
@@ -3510,7 +3537,7 @@
           </p:nvSpPr>
           <p:spPr>
             <a:xfrm>
-              <a:off x="124" y="6478"/>
+              <a:off x="124" y="6768"/>
               <a:ext cx="1248" cy="580"/>
             </a:xfrm>
             <a:prstGeom prst="rect">
@@ -3539,7 +3566,7 @@
           </p:nvSpPr>
           <p:spPr>
             <a:xfrm>
-              <a:off x="113" y="7058"/>
+              <a:off x="124" y="7223"/>
               <a:ext cx="1248" cy="580"/>
             </a:xfrm>
             <a:prstGeom prst="rect">
@@ -3599,8 +3626,8 @@
         </p:nvSpPr>
         <p:spPr>
           <a:xfrm rot="16200000">
-            <a:off x="5919470" y="3305175"/>
-            <a:ext cx="915670" cy="3222625"/>
+            <a:off x="6161405" y="3606165"/>
+            <a:ext cx="915670" cy="2739390"/>
           </a:xfrm>
           <a:prstGeom prst="can">
             <a:avLst/>
@@ -3683,7 +3710,15 @@
                   <a:schemeClr val="tx1"/>
                 </a:solidFill>
               </a:rPr>
-              <a:t>拓扑管理</a:t>
+              <a:t>拓扑</a:t>
+            </a:r>
+            <a:r>
+              <a:rPr lang="en-US" altLang="zh-CN">
+                <a:solidFill>
+                  <a:schemeClr val="tx1"/>
+                </a:solidFill>
+              </a:rPr>
+              <a:t>/</a:t>
             </a:r>
             <a:r>
               <a:rPr lang="zh-CN" altLang="en-US">
@@ -3691,7 +3726,23 @@
                   <a:schemeClr val="tx1"/>
                 </a:solidFill>
               </a:rPr>
-              <a:t>功能</a:t>
+              <a:t>星历</a:t>
+            </a:r>
+            <a:endParaRPr lang="zh-CN" altLang="en-US">
+              <a:solidFill>
+                <a:schemeClr val="tx1"/>
+              </a:solidFill>
+            </a:endParaRPr>
+          </a:p>
+          <a:p>
+            <a:pPr algn="ctr"/>
+            <a:r>
+              <a:rPr lang="zh-CN" altLang="en-US">
+                <a:solidFill>
+                  <a:schemeClr val="tx1"/>
+                </a:solidFill>
+              </a:rPr>
+              <a:t>管理</a:t>
             </a:r>
             <a:endParaRPr lang="zh-CN" altLang="en-US">
               <a:solidFill>
@@ -3789,8 +3840,8 @@
         </p:nvSpPr>
         <p:spPr>
           <a:xfrm>
-            <a:off x="5631180" y="4732655"/>
-            <a:ext cx="1882775" cy="368300"/>
+            <a:off x="5462270" y="4725670"/>
+            <a:ext cx="2526665" cy="368300"/>
           </a:xfrm>
           <a:prstGeom prst="rect">
             <a:avLst/>
@@ -3802,13 +3853,18 @@
             <a:spAutoFit/>
           </a:bodyPr>
           <a:p>
+            <a:pPr algn="ctr"/>
             <a:r>
               <a:rPr lang="zh-CN" altLang="en-US"/>
-              <a:t>星间路由</a:t>
+              <a:t>星间</a:t>
+            </a:r>
+            <a:r>
+              <a:rPr lang="en-US" altLang="zh-CN"/>
+              <a:t>/</a:t>
             </a:r>
             <a:r>
               <a:rPr lang="zh-CN" altLang="en-US"/>
-              <a:t>控制面</a:t>
+              <a:t>星地多跳传输</a:t>
             </a:r>
             <a:endParaRPr lang="zh-CN" altLang="en-US"/>
           </a:p>
@@ -4084,9 +4140,9 @@
           <p:nvPr/>
         </p:nvSpPr>
         <p:spPr>
-          <a:xfrm rot="2640000">
-            <a:off x="3829050" y="3694430"/>
-            <a:ext cx="927100" cy="583565"/>
+          <a:xfrm rot="2220000">
+            <a:off x="3966210" y="3914775"/>
+            <a:ext cx="1562100" cy="583565"/>
           </a:xfrm>
           <a:prstGeom prst="rightArrow">
             <a:avLst/>
@@ -4348,8 +4404,8 @@
         </p:nvSpPr>
         <p:spPr>
           <a:xfrm rot="19380000">
-            <a:off x="8017510" y="3726180"/>
-            <a:ext cx="927100" cy="583565"/>
+            <a:off x="7919720" y="3758565"/>
+            <a:ext cx="1035685" cy="583565"/>
           </a:xfrm>
           <a:prstGeom prst="rightArrow">
             <a:avLst/>
@@ -4435,16 +4491,35 @@
                 <a:solidFill>
                   <a:schemeClr val="tx1"/>
                 </a:solidFill>
+                <a:sym typeface="+mn-ea"/>
               </a:rPr>
-              <a:t>信源信道联合</a:t>
+              <a:t>任务</a:t>
             </a:r>
             <a:r>
               <a:rPr lang="zh-CN" altLang="en-US">
                 <a:solidFill>
                   <a:schemeClr val="tx1"/>
                 </a:solidFill>
+                <a:sym typeface="+mn-ea"/>
               </a:rPr>
-              <a:t>解码器</a:t>
+              <a:t>感知语义</a:t>
+            </a:r>
+            <a:endParaRPr lang="zh-CN" altLang="en-US">
+              <a:solidFill>
+                <a:schemeClr val="tx1"/>
+              </a:solidFill>
+            </a:endParaRPr>
+          </a:p>
+          <a:p>
+            <a:pPr algn="ctr"/>
+            <a:r>
+              <a:rPr lang="zh-CN" altLang="en-US">
+                <a:solidFill>
+                  <a:schemeClr val="tx1"/>
+                </a:solidFill>
+                <a:sym typeface="+mn-ea"/>
+              </a:rPr>
+              <a:t>编码器</a:t>
             </a:r>
             <a:endParaRPr lang="zh-CN" altLang="en-US">
               <a:solidFill>
@@ -4717,8 +4792,8 @@
         </p:nvSpPr>
         <p:spPr>
           <a:xfrm>
-            <a:off x="4631690" y="5691505"/>
-            <a:ext cx="3080385" cy="645160"/>
+            <a:off x="3550285" y="5691505"/>
+            <a:ext cx="5549900" cy="645160"/>
           </a:xfrm>
           <a:prstGeom prst="rect">
             <a:avLst/>
@@ -4732,10 +4807,11 @@
           <a:p>
             <a:pPr algn="ctr"/>
             <a:r>
-              <a:rPr lang="zh-CN" altLang="en-US">
+              <a:rPr lang="en-US" altLang="zh-CN">
                 <a:latin typeface="Calibri" panose="020F0502020204030204" charset="0"/>
+                <a:sym typeface="+mn-ea"/>
               </a:rPr>
-              <a:t>①</a:t>
+              <a:t>②</a:t>
             </a:r>
             <a:r>
               <a:rPr lang="en-US" altLang="zh-CN">
@@ -4747,7 +4823,7 @@
               <a:rPr lang="zh-CN" altLang="en-US" b="1">
                 <a:latin typeface="Calibri" panose="020F0502020204030204" charset="0"/>
               </a:rPr>
-              <a:t>分布式用户协作切换</a:t>
+              <a:t>基于局部公平性估计的分布式协作切换</a:t>
             </a:r>
             <a:endParaRPr lang="zh-CN" altLang="en-US">
               <a:latin typeface="Calibri" panose="020F0502020204030204" charset="0"/>
@@ -4790,8 +4866,8 @@
         </p:nvSpPr>
         <p:spPr>
           <a:xfrm>
-            <a:off x="4692650" y="3805555"/>
-            <a:ext cx="3404870" cy="645160"/>
+            <a:off x="4794250" y="3608070"/>
+            <a:ext cx="3404870" cy="922020"/>
           </a:xfrm>
           <a:prstGeom prst="rect">
             <a:avLst/>
@@ -4806,9 +4882,10 @@
             <a:pPr algn="ctr"/>
             <a:r>
               <a:rPr lang="zh-CN" altLang="en-US">
-                <a:latin typeface="Calibri" panose="020F0502020204030204" charset="0"/>
+                <a:latin typeface="微软雅黑" panose="020B0503020204020204" charset="-122"/>
+                <a:ea typeface="微软雅黑" panose="020B0503020204020204" charset="-122"/>
               </a:rPr>
-              <a:t>③</a:t>
+              <a:t>④</a:t>
             </a:r>
             <a:r>
               <a:rPr lang="en-US" altLang="zh-CN">
@@ -4820,21 +4897,21 @@
               <a:rPr lang="zh-CN" altLang="en-US" b="1">
                 <a:latin typeface="Calibri" panose="020F0502020204030204" charset="0"/>
               </a:rPr>
-              <a:t>语义</a:t>
-            </a:r>
-            <a:r>
-              <a:rPr lang="en-US" altLang="zh-CN" b="1">
-                <a:latin typeface="Calibri" panose="020F0502020204030204" charset="0"/>
-              </a:rPr>
-              <a:t>HARQ</a:t>
-            </a:r>
+              <a:t>基于协同增量重传的</a:t>
+            </a:r>
+            <a:endParaRPr lang="zh-CN" altLang="en-US" b="1">
+              <a:latin typeface="Calibri" panose="020F0502020204030204" charset="0"/>
+            </a:endParaRPr>
+          </a:p>
+          <a:p>
+            <a:pPr algn="ctr"/>
             <a:r>
               <a:rPr lang="zh-CN" altLang="en-US" b="1">
                 <a:latin typeface="Calibri" panose="020F0502020204030204" charset="0"/>
               </a:rPr>
-              <a:t>与语义驱动路由</a:t>
-            </a:r>
-            <a:endParaRPr lang="zh-CN" altLang="en-US">
+              <a:t>轻量化语义传输</a:t>
+            </a:r>
+            <a:endParaRPr lang="zh-CN" altLang="en-US" b="1">
               <a:latin typeface="Calibri" panose="020F0502020204030204" charset="0"/>
             </a:endParaRPr>
           </a:p>
@@ -4875,8 +4952,8 @@
         </p:nvSpPr>
         <p:spPr>
           <a:xfrm>
-            <a:off x="4794250" y="2611120"/>
-            <a:ext cx="3481070" cy="645160"/>
+            <a:off x="4718050" y="2212340"/>
+            <a:ext cx="3481070" cy="922020"/>
           </a:xfrm>
           <a:prstGeom prst="rect">
             <a:avLst/>
@@ -4890,10 +4967,11 @@
           <a:p>
             <a:pPr algn="ctr"/>
             <a:r>
-              <a:rPr lang="en-US" altLang="zh-CN">
+              <a:rPr lang="zh-CN" altLang="en-US">
                 <a:latin typeface="Calibri" panose="020F0502020204030204" charset="0"/>
+                <a:sym typeface="+mn-ea"/>
               </a:rPr>
-              <a:t>②</a:t>
+              <a:t>③</a:t>
             </a:r>
             <a:r>
               <a:rPr lang="en-US" altLang="zh-CN" b="1">
@@ -4905,7 +4983,19 @@
               <a:rPr lang="zh-CN" altLang="en-US" b="1">
                 <a:latin typeface="Calibri" panose="020F0502020204030204" charset="0"/>
               </a:rPr>
-              <a:t>跨层资源编排与无线资源分配</a:t>
+              <a:t>基于生成式网络态势感知的切片</a:t>
+            </a:r>
+            <a:r>
+              <a:rPr lang="en-US" altLang="zh-CN" b="1">
+                <a:latin typeface="Calibri" panose="020F0502020204030204" charset="0"/>
+              </a:rPr>
+              <a:t>-MAC</a:t>
+            </a:r>
+            <a:r>
+              <a:rPr lang="zh-CN" altLang="en-US" b="1">
+                <a:latin typeface="Calibri" panose="020F0502020204030204" charset="0"/>
+              </a:rPr>
+              <a:t>分层协作优化</a:t>
             </a:r>
             <a:endParaRPr lang="zh-CN" altLang="en-US">
               <a:latin typeface="Calibri" panose="020F0502020204030204" charset="0"/>
@@ -4920,7 +5010,7 @@
                 </a:solidFill>
                 <a:latin typeface="Calibri" panose="020F0502020204030204" charset="0"/>
               </a:rPr>
-              <a:t>提供具有</a:t>
+              <a:t>支撑长期</a:t>
             </a:r>
             <a:r>
               <a:rPr lang="en-US" altLang="zh-CN" b="1">
@@ -4938,16 +5028,7 @@
                 </a:solidFill>
                 <a:latin typeface="Calibri" panose="020F0502020204030204" charset="0"/>
               </a:rPr>
-              <a:t>保障的用户</a:t>
-            </a:r>
-            <a:r>
-              <a:rPr lang="zh-CN" altLang="en-US" b="1">
-                <a:solidFill>
-                  <a:srgbClr val="FF0000"/>
-                </a:solidFill>
-                <a:latin typeface="Calibri" panose="020F0502020204030204" charset="0"/>
-              </a:rPr>
-              <a:t>接入</a:t>
+              <a:t>保障</a:t>
             </a:r>
             <a:endParaRPr lang="zh-CN" altLang="en-US" b="1">
               <a:solidFill>
@@ -4976,7 +5057,9 @@
           </a:prstGeom>
           <a:ln w="19050">
             <a:solidFill>
-              <a:srgbClr val="C00000"/>
+              <a:schemeClr val="bg1">
+                <a:lumMod val="50000"/>
+              </a:schemeClr>
             </a:solidFill>
           </a:ln>
         </p:spPr>
@@ -5011,7 +5094,9 @@
           </a:prstGeom>
           <a:ln w="19050">
             <a:solidFill>
-              <a:srgbClr val="C00000"/>
+              <a:schemeClr val="bg1">
+                <a:lumMod val="50000"/>
+              </a:schemeClr>
             </a:solidFill>
           </a:ln>
         </p:spPr>
@@ -5046,7 +5131,9 @@
           </a:prstGeom>
           <a:ln w="19050">
             <a:solidFill>
-              <a:srgbClr val="C00000"/>
+              <a:schemeClr val="bg1">
+                <a:lumMod val="50000"/>
+              </a:schemeClr>
             </a:solidFill>
             <a:headEnd type="triangle"/>
           </a:ln>
@@ -5082,7 +5169,9 @@
           </a:prstGeom>
           <a:ln w="19050">
             <a:solidFill>
-              <a:srgbClr val="C00000"/>
+              <a:schemeClr val="bg1">
+                <a:lumMod val="50000"/>
+              </a:schemeClr>
             </a:solidFill>
             <a:headEnd type="triangle"/>
           </a:ln>
@@ -5118,7 +5207,9 @@
           </a:prstGeom>
           <a:ln w="19050">
             <a:solidFill>
-              <a:srgbClr val="C00000"/>
+              <a:schemeClr val="bg1">
+                <a:lumMod val="50000"/>
+              </a:schemeClr>
             </a:solidFill>
           </a:ln>
         </p:spPr>
@@ -5153,7 +5244,9 @@
           </a:prstGeom>
           <a:ln w="19050">
             <a:solidFill>
-              <a:srgbClr val="C00000"/>
+              <a:schemeClr val="bg1">
+                <a:lumMod val="50000"/>
+              </a:schemeClr>
             </a:solidFill>
           </a:ln>
         </p:spPr>
@@ -5188,7 +5281,9 @@
           </a:prstGeom>
           <a:ln w="19050">
             <a:solidFill>
-              <a:srgbClr val="C00000"/>
+              <a:schemeClr val="bg1">
+                <a:lumMod val="50000"/>
+              </a:schemeClr>
             </a:solidFill>
             <a:headEnd type="triangle"/>
           </a:ln>
@@ -5252,8 +5347,8 @@
         </p:nvSpPr>
         <p:spPr>
           <a:xfrm>
-            <a:off x="9842500" y="342900"/>
-            <a:ext cx="685165" cy="368300"/>
+            <a:off x="9842500" y="433705"/>
+            <a:ext cx="1071880" cy="645160"/>
           </a:xfrm>
           <a:prstGeom prst="rect">
             <a:avLst/>
@@ -5269,20 +5364,28 @@
               <a:rPr lang="zh-CN" altLang="en-US"/>
               <a:t>监控</a:t>
             </a:r>
-            <a:endParaRPr lang="zh-CN" altLang="en-US"/>
-          </a:p>
-        </p:txBody>
-      </p:sp>
-      <p:sp>
-        <p:nvSpPr>
-          <p:cNvPr id="61" name="文本框 60"/>
+            <a:r>
+              <a:rPr lang="en-US" altLang="zh-CN"/>
+              <a:t>/</a:t>
+            </a:r>
+            <a:r>
+              <a:rPr lang="zh-CN" altLang="en-US"/>
+              <a:t>离线配置</a:t>
+            </a:r>
+            <a:endParaRPr lang="zh-CN" altLang="en-US"/>
+          </a:p>
+        </p:txBody>
+      </p:sp>
+      <p:sp>
+        <p:nvSpPr>
+          <p:cNvPr id="7" name="文本框 6"/>
           <p:cNvSpPr txBox="1"/>
           <p:nvPr/>
         </p:nvSpPr>
         <p:spPr>
           <a:xfrm>
-            <a:off x="2252980" y="342900"/>
-            <a:ext cx="685165" cy="368300"/>
+            <a:off x="7838440" y="1158240"/>
+            <a:ext cx="1491615" cy="306705"/>
           </a:xfrm>
           <a:prstGeom prst="rect">
             <a:avLst/>
@@ -5294,23 +5397,28 @@
             <a:spAutoFit/>
           </a:bodyPr>
           <a:p>
-            <a:r>
-              <a:rPr lang="zh-CN" altLang="en-US"/>
-              <a:t>监控</a:t>
-            </a:r>
-            <a:endParaRPr lang="zh-CN" altLang="en-US"/>
-          </a:p>
-        </p:txBody>
-      </p:sp>
-      <p:sp>
-        <p:nvSpPr>
-          <p:cNvPr id="7" name="文本框 6"/>
+            <a:pPr algn="ctr"/>
+            <a:r>
+              <a:rPr lang="zh-CN" altLang="en-US" sz="1400"/>
+              <a:t>切片</a:t>
+            </a:r>
+            <a:r>
+              <a:rPr lang="zh-CN" altLang="en-US" sz="1400"/>
+              <a:t>调度器</a:t>
+            </a:r>
+            <a:endParaRPr lang="zh-CN" altLang="en-US" sz="1400"/>
+          </a:p>
+        </p:txBody>
+      </p:sp>
+      <p:sp>
+        <p:nvSpPr>
+          <p:cNvPr id="9" name="文本框 8"/>
           <p:cNvSpPr txBox="1"/>
           <p:nvPr/>
         </p:nvSpPr>
         <p:spPr>
           <a:xfrm>
-            <a:off x="7838440" y="1158240"/>
+            <a:off x="5763895" y="1165225"/>
             <a:ext cx="1491615" cy="306705"/>
           </a:xfrm>
           <a:prstGeom prst="rect">
@@ -5326,11 +5434,11 @@
             <a:pPr algn="ctr"/>
             <a:r>
               <a:rPr lang="zh-CN" altLang="en-US" sz="1400"/>
-              <a:t>切片</a:t>
+              <a:t>路由控制</a:t>
             </a:r>
             <a:r>
               <a:rPr lang="zh-CN" altLang="en-US" sz="1400"/>
-              <a:t>调度器</a:t>
+              <a:t>面</a:t>
             </a:r>
             <a:endParaRPr lang="zh-CN" altLang="en-US" sz="1400"/>
           </a:p>
@@ -5338,13 +5446,13 @@
       </p:sp>
       <p:sp>
         <p:nvSpPr>
-          <p:cNvPr id="9" name="文本框 8"/>
+          <p:cNvPr id="16" name="文本框 15"/>
           <p:cNvSpPr txBox="1"/>
           <p:nvPr/>
         </p:nvSpPr>
         <p:spPr>
           <a:xfrm>
-            <a:off x="5763895" y="1165225"/>
+            <a:off x="3602990" y="1168400"/>
             <a:ext cx="1491615" cy="306705"/>
           </a:xfrm>
           <a:prstGeom prst="rect">
@@ -5360,11 +5468,11 @@
             <a:pPr algn="ctr"/>
             <a:r>
               <a:rPr lang="zh-CN" altLang="en-US" sz="1400"/>
-              <a:t>路由控制</a:t>
+              <a:t>切换控制</a:t>
             </a:r>
             <a:r>
               <a:rPr lang="zh-CN" altLang="en-US" sz="1400"/>
-              <a:t>面</a:t>
+              <a:t>器</a:t>
             </a:r>
             <a:endParaRPr lang="zh-CN" altLang="en-US" sz="1400"/>
           </a:p>
@@ -5372,19 +5480,89 @@
       </p:sp>
       <p:sp>
         <p:nvSpPr>
-          <p:cNvPr id="16" name="文本框 15"/>
-          <p:cNvSpPr txBox="1"/>
+          <p:cNvPr id="20" name="矩形 19"/>
+          <p:cNvSpPr/>
           <p:nvPr/>
         </p:nvSpPr>
         <p:spPr>
           <a:xfrm>
-            <a:off x="3602990" y="1168400"/>
-            <a:ext cx="1491615" cy="306705"/>
+            <a:off x="3653790" y="4387215"/>
+            <a:ext cx="1389380" cy="706755"/>
           </a:xfrm>
           <a:prstGeom prst="rect">
             <a:avLst/>
           </a:prstGeom>
           <a:noFill/>
+          <a:ln w="22225">
+            <a:solidFill>
+              <a:schemeClr val="tx1"/>
+            </a:solidFill>
+          </a:ln>
+        </p:spPr>
+        <p:style>
+          <a:lnRef idx="2">
+            <a:schemeClr val="accent1">
+              <a:lumMod val="75000"/>
+            </a:schemeClr>
+          </a:lnRef>
+          <a:fillRef idx="1">
+            <a:schemeClr val="accent1"/>
+          </a:fillRef>
+          <a:effectRef idx="0">
+            <a:srgbClr val="FFFFFF"/>
+          </a:effectRef>
+          <a:fontRef idx="minor">
+            <a:schemeClr val="lt1"/>
+          </a:fontRef>
+        </p:style>
+        <p:txBody>
+          <a:bodyPr rtlCol="0" anchor="ctr"/>
+          <a:p>
+            <a:pPr algn="ctr"/>
+            <a:r>
+              <a:rPr lang="zh-CN" altLang="en-US">
+                <a:solidFill>
+                  <a:schemeClr val="tx1">
+                    <a:lumMod val="95000"/>
+                    <a:lumOff val="5000"/>
+                  </a:schemeClr>
+                </a:solidFill>
+                <a:latin typeface="Calibri" panose="020F0502020204030204" charset="0"/>
+                <a:sym typeface="+mn-ea"/>
+              </a:rPr>
+              <a:t>①</a:t>
+            </a:r>
+            <a:r>
+              <a:rPr lang="zh-CN" altLang="en-US" b="1">
+                <a:solidFill>
+                  <a:schemeClr val="tx1"/>
+                </a:solidFill>
+              </a:rPr>
+              <a:t>可信本地多跳感知</a:t>
+            </a:r>
+            <a:endParaRPr lang="zh-CN" altLang="en-US" b="1">
+              <a:solidFill>
+                <a:schemeClr val="tx1"/>
+              </a:solidFill>
+            </a:endParaRPr>
+          </a:p>
+        </p:txBody>
+      </p:sp>
+      <p:sp>
+        <p:nvSpPr>
+          <p:cNvPr id="35" name="文本框 34"/>
+          <p:cNvSpPr txBox="1"/>
+          <p:nvPr/>
+        </p:nvSpPr>
+        <p:spPr>
+          <a:xfrm>
+            <a:off x="3273425" y="4947285"/>
+            <a:ext cx="2273300" cy="645160"/>
+          </a:xfrm>
+          <a:prstGeom prst="rect">
+            <a:avLst/>
+          </a:prstGeom>
+          <a:noFill/>
         </p:spPr>
         <p:txBody>
           <a:bodyPr wrap="square" rtlCol="0">
@@ -5393,14 +5571,128 @@
           <a:p>
             <a:pPr algn="ctr"/>
             <a:r>
-              <a:rPr lang="zh-CN" altLang="en-US" sz="1400"/>
-              <a:t>切换控制</a:t>
-            </a:r>
-            <a:r>
-              <a:rPr lang="zh-CN" altLang="en-US" sz="1400"/>
-              <a:t>器</a:t>
-            </a:r>
-            <a:endParaRPr lang="zh-CN" altLang="en-US" sz="1400"/>
+              <a:rPr lang="zh-CN" altLang="en-US" b="1">
+                <a:solidFill>
+                  <a:srgbClr val="FF0000"/>
+                </a:solidFill>
+                <a:latin typeface="Calibri" panose="020F0502020204030204" charset="0"/>
+              </a:rPr>
+              <a:t>提供可靠的</a:t>
+            </a:r>
+            <a:endParaRPr lang="zh-CN" altLang="en-US" b="1">
+              <a:solidFill>
+                <a:srgbClr val="FF0000"/>
+              </a:solidFill>
+              <a:latin typeface="Calibri" panose="020F0502020204030204" charset="0"/>
+            </a:endParaRPr>
+          </a:p>
+          <a:p>
+            <a:pPr algn="ctr"/>
+            <a:r>
+              <a:rPr lang="zh-CN" altLang="en-US" b="1">
+                <a:solidFill>
+                  <a:srgbClr val="FF0000"/>
+                </a:solidFill>
+                <a:latin typeface="Calibri" panose="020F0502020204030204" charset="0"/>
+              </a:rPr>
+              <a:t>网络</a:t>
+            </a:r>
+            <a:r>
+              <a:rPr lang="zh-CN" altLang="en-US" b="1">
+                <a:solidFill>
+                  <a:srgbClr val="FF0000"/>
+                </a:solidFill>
+                <a:latin typeface="Calibri" panose="020F0502020204030204" charset="0"/>
+              </a:rPr>
+              <a:t>视图</a:t>
+            </a:r>
+            <a:endParaRPr lang="zh-CN" altLang="en-US" b="1">
+              <a:solidFill>
+                <a:srgbClr val="FF0000"/>
+              </a:solidFill>
+              <a:latin typeface="Calibri" panose="020F0502020204030204" charset="0"/>
+            </a:endParaRPr>
+          </a:p>
+        </p:txBody>
+      </p:sp>
+      <p:sp>
+        <p:nvSpPr>
+          <p:cNvPr id="36" name="文本框 35"/>
+          <p:cNvSpPr txBox="1"/>
+          <p:nvPr/>
+        </p:nvSpPr>
+        <p:spPr>
+          <a:xfrm>
+            <a:off x="1839595" y="447675"/>
+            <a:ext cx="1071880" cy="645160"/>
+          </a:xfrm>
+          <a:prstGeom prst="rect">
+            <a:avLst/>
+          </a:prstGeom>
+          <a:noFill/>
+        </p:spPr>
+        <p:txBody>
+          <a:bodyPr wrap="square" rtlCol="0">
+            <a:spAutoFit/>
+          </a:bodyPr>
+          <a:p>
+            <a:r>
+              <a:rPr lang="zh-CN" altLang="en-US"/>
+              <a:t>监控</a:t>
+            </a:r>
+            <a:r>
+              <a:rPr lang="en-US" altLang="zh-CN"/>
+              <a:t>/</a:t>
+            </a:r>
+            <a:r>
+              <a:rPr lang="zh-CN" altLang="en-US"/>
+              <a:t>离线配置</a:t>
+            </a:r>
+            <a:endParaRPr lang="zh-CN" altLang="en-US"/>
+          </a:p>
+        </p:txBody>
+      </p:sp>
+      <p:sp>
+        <p:nvSpPr>
+          <p:cNvPr id="38" name="右箭头 37"/>
+          <p:cNvSpPr/>
+          <p:nvPr/>
+        </p:nvSpPr>
+        <p:spPr>
+          <a:xfrm>
+            <a:off x="5043170" y="4850130"/>
+            <a:ext cx="568960" cy="583565"/>
+          </a:xfrm>
+          <a:prstGeom prst="rightArrow">
+            <a:avLst/>
+          </a:prstGeom>
+          <a:solidFill>
+            <a:schemeClr val="accent1">
+              <a:alpha val="64000"/>
+            </a:schemeClr>
+          </a:solidFill>
+        </p:spPr>
+        <p:style>
+          <a:lnRef idx="2">
+            <a:schemeClr val="accent1">
+              <a:lumMod val="75000"/>
+            </a:schemeClr>
+          </a:lnRef>
+          <a:fillRef idx="1">
+            <a:schemeClr val="accent1"/>
+          </a:fillRef>
+          <a:effectRef idx="0">
+            <a:srgbClr val="FFFFFF"/>
+          </a:effectRef>
+          <a:fontRef idx="minor">
+            <a:schemeClr val="lt1"/>
+          </a:fontRef>
+        </p:style>
+        <p:txBody>
+          <a:bodyPr rtlCol="0" anchor="ctr"/>
+          <a:p>
+            <a:pPr algn="ctr"/>
+            <a:endParaRPr lang="zh-CN" altLang="en-US"/>
           </a:p>
         </p:txBody>
       </p:sp>

--- a/figures/ppt/技术耦合.pptx
+++ b/figures/ppt/技术耦合.pptx
@@ -4517,9 +4517,8 @@
                 <a:solidFill>
                   <a:schemeClr val="tx1"/>
                 </a:solidFill>
-                <a:sym typeface="+mn-ea"/>
               </a:rPr>
-              <a:t>编码器</a:t>
+              <a:t>解码器</a:t>
             </a:r>
             <a:endParaRPr lang="zh-CN" altLang="en-US">
               <a:solidFill>
@@ -4808,6 +4807,9 @@
             <a:pPr algn="ctr"/>
             <a:r>
               <a:rPr lang="en-US" altLang="zh-CN">
+                <a:solidFill>
+                  <a:srgbClr val="FF0000"/>
+                </a:solidFill>
                 <a:latin typeface="Calibri" panose="020F0502020204030204" charset="0"/>
                 <a:sym typeface="+mn-ea"/>
               </a:rPr>
@@ -4831,24 +4833,6 @@
           </a:p>
           <a:p>
             <a:pPr algn="ctr"/>
-            <a:r>
-              <a:rPr lang="zh-CN" altLang="en-US" b="1">
-                <a:solidFill>
-                  <a:srgbClr val="FF0000"/>
-                </a:solidFill>
-                <a:latin typeface="Calibri" panose="020F0502020204030204" charset="0"/>
-              </a:rPr>
-              <a:t>提供连续的通信</a:t>
-            </a:r>
-            <a:r>
-              <a:rPr lang="zh-CN" altLang="en-US" b="1">
-                <a:solidFill>
-                  <a:srgbClr val="FF0000"/>
-                </a:solidFill>
-                <a:latin typeface="Calibri" panose="020F0502020204030204" charset="0"/>
-              </a:rPr>
-              <a:t>连接</a:t>
-            </a:r>
             <a:endParaRPr lang="zh-CN" altLang="en-US" b="1">
               <a:solidFill>
                 <a:srgbClr val="FF0000"/>
@@ -4866,7 +4850,7 @@
         </p:nvSpPr>
         <p:spPr>
           <a:xfrm>
-            <a:off x="4794250" y="3608070"/>
+            <a:off x="4794250" y="3803650"/>
             <a:ext cx="3404870" cy="922020"/>
           </a:xfrm>
           <a:prstGeom prst="rect">
@@ -4882,6 +4866,9 @@
             <a:pPr algn="ctr"/>
             <a:r>
               <a:rPr lang="zh-CN" altLang="en-US">
+                <a:solidFill>
+                  <a:srgbClr val="FF0000"/>
+                </a:solidFill>
                 <a:latin typeface="微软雅黑" panose="020B0503020204020204" charset="-122"/>
                 <a:ea typeface="微软雅黑" panose="020B0503020204020204" charset="-122"/>
               </a:rPr>
@@ -4917,24 +4904,6 @@
           </a:p>
           <a:p>
             <a:pPr algn="ctr"/>
-            <a:r>
-              <a:rPr lang="zh-CN" altLang="en-US" b="1">
-                <a:solidFill>
-                  <a:srgbClr val="FF0000"/>
-                </a:solidFill>
-                <a:latin typeface="Calibri" panose="020F0502020204030204" charset="0"/>
-              </a:rPr>
-              <a:t>提供语义保真的端到端</a:t>
-            </a:r>
-            <a:r>
-              <a:rPr lang="zh-CN" altLang="en-US" b="1">
-                <a:solidFill>
-                  <a:srgbClr val="FF0000"/>
-                </a:solidFill>
-                <a:latin typeface="Calibri" panose="020F0502020204030204" charset="0"/>
-              </a:rPr>
-              <a:t>传输</a:t>
-            </a:r>
             <a:endParaRPr lang="zh-CN" altLang="en-US" b="1">
               <a:solidFill>
                 <a:srgbClr val="FF0000"/>
@@ -4952,7 +4921,7 @@
         </p:nvSpPr>
         <p:spPr>
           <a:xfrm>
-            <a:off x="4718050" y="2212340"/>
+            <a:off x="4718050" y="2412365"/>
             <a:ext cx="3481070" cy="922020"/>
           </a:xfrm>
           <a:prstGeom prst="rect">
@@ -4968,6 +4937,9 @@
             <a:pPr algn="ctr"/>
             <a:r>
               <a:rPr lang="zh-CN" altLang="en-US">
+                <a:solidFill>
+                  <a:srgbClr val="FF0000"/>
+                </a:solidFill>
                 <a:latin typeface="Calibri" panose="020F0502020204030204" charset="0"/>
                 <a:sym typeface="+mn-ea"/>
               </a:rPr>
@@ -5003,33 +4975,6 @@
           </a:p>
           <a:p>
             <a:pPr algn="ctr"/>
-            <a:r>
-              <a:rPr lang="zh-CN" altLang="en-US" b="1">
-                <a:solidFill>
-                  <a:srgbClr val="FF0000"/>
-                </a:solidFill>
-                <a:latin typeface="Calibri" panose="020F0502020204030204" charset="0"/>
-              </a:rPr>
-              <a:t>支撑长期</a:t>
-            </a:r>
-            <a:r>
-              <a:rPr lang="en-US" altLang="zh-CN" b="1">
-                <a:solidFill>
-                  <a:srgbClr val="FF0000"/>
-                </a:solidFill>
-                <a:latin typeface="Calibri" panose="020F0502020204030204" charset="0"/>
-              </a:rPr>
-              <a:t>QoS</a:t>
-            </a:r>
-            <a:r>
-              <a:rPr lang="zh-CN" altLang="en-US" b="1">
-                <a:solidFill>
-                  <a:srgbClr val="FF0000"/>
-                </a:solidFill>
-                <a:latin typeface="Calibri" panose="020F0502020204030204" charset="0"/>
-              </a:rPr>
-              <a:t>保障</a:t>
-            </a:r>
             <a:endParaRPr lang="zh-CN" altLang="en-US" b="1">
               <a:solidFill>
                 <a:srgbClr val="FF0000"/>
@@ -5486,13 +5431,17 @@
         </p:nvSpPr>
         <p:spPr>
           <a:xfrm>
-            <a:off x="3653790" y="4387215"/>
+            <a:off x="3653790" y="4518025"/>
             <a:ext cx="1389380" cy="706755"/>
           </a:xfrm>
           <a:prstGeom prst="rect">
             <a:avLst/>
           </a:prstGeom>
-          <a:noFill/>
+          <a:solidFill>
+            <a:schemeClr val="bg2">
+              <a:lumMod val="90000"/>
+            </a:schemeClr>
+          </a:solidFill>
           <a:ln w="22225">
             <a:solidFill>
               <a:schemeClr val="tx1"/>
@@ -5522,10 +5471,7 @@
             <a:r>
               <a:rPr lang="zh-CN" altLang="en-US">
                 <a:solidFill>
-                  <a:schemeClr val="tx1">
-                    <a:lumMod val="95000"/>
-                    <a:lumOff val="5000"/>
-                  </a:schemeClr>
+                  <a:srgbClr val="FF0000"/>
                 </a:solidFill>
                 <a:latin typeface="Calibri" panose="020F0502020204030204" charset="0"/>
                 <a:sym typeface="+mn-ea"/>
@@ -5550,14 +5496,14 @@
       </p:sp>
       <p:sp>
         <p:nvSpPr>
-          <p:cNvPr id="35" name="文本框 34"/>
+          <p:cNvPr id="36" name="文本框 35"/>
           <p:cNvSpPr txBox="1"/>
           <p:nvPr/>
         </p:nvSpPr>
         <p:spPr>
           <a:xfrm>
-            <a:off x="3273425" y="4947285"/>
-            <a:ext cx="2273300" cy="645160"/>
+            <a:off x="1839595" y="447675"/>
+            <a:ext cx="1071880" cy="645160"/>
           </a:xfrm>
           <a:prstGeom prst="rect">
             <a:avLst/>
@@ -5569,133 +5515,60 @@
             <a:spAutoFit/>
           </a:bodyPr>
           <a:p>
-            <a:pPr algn="ctr"/>
-            <a:r>
-              <a:rPr lang="zh-CN" altLang="en-US" b="1">
-                <a:solidFill>
-                  <a:srgbClr val="FF0000"/>
-                </a:solidFill>
-                <a:latin typeface="Calibri" panose="020F0502020204030204" charset="0"/>
-              </a:rPr>
-              <a:t>提供可靠的</a:t>
-            </a:r>
-            <a:endParaRPr lang="zh-CN" altLang="en-US" b="1">
-              <a:solidFill>
-                <a:srgbClr val="FF0000"/>
-              </a:solidFill>
-              <a:latin typeface="Calibri" panose="020F0502020204030204" charset="0"/>
-            </a:endParaRPr>
-          </a:p>
-          <a:p>
-            <a:pPr algn="ctr"/>
-            <a:r>
-              <a:rPr lang="zh-CN" altLang="en-US" b="1">
-                <a:solidFill>
-                  <a:srgbClr val="FF0000"/>
-                </a:solidFill>
-                <a:latin typeface="Calibri" panose="020F0502020204030204" charset="0"/>
-              </a:rPr>
-              <a:t>网络</a:t>
-            </a:r>
-            <a:r>
-              <a:rPr lang="zh-CN" altLang="en-US" b="1">
-                <a:solidFill>
-                  <a:srgbClr val="FF0000"/>
-                </a:solidFill>
-                <a:latin typeface="Calibri" panose="020F0502020204030204" charset="0"/>
-              </a:rPr>
-              <a:t>视图</a:t>
-            </a:r>
-            <a:endParaRPr lang="zh-CN" altLang="en-US" b="1">
-              <a:solidFill>
-                <a:srgbClr val="FF0000"/>
-              </a:solidFill>
-              <a:latin typeface="Calibri" panose="020F0502020204030204" charset="0"/>
-            </a:endParaRPr>
-          </a:p>
-        </p:txBody>
-      </p:sp>
-      <p:sp>
-        <p:nvSpPr>
-          <p:cNvPr id="36" name="文本框 35"/>
-          <p:cNvSpPr txBox="1"/>
+            <a:r>
+              <a:rPr lang="zh-CN" altLang="en-US"/>
+              <a:t>监控</a:t>
+            </a:r>
+            <a:r>
+              <a:rPr lang="en-US" altLang="zh-CN"/>
+              <a:t>/</a:t>
+            </a:r>
+            <a:r>
+              <a:rPr lang="zh-CN" altLang="en-US"/>
+              <a:t>离线配置</a:t>
+            </a:r>
+            <a:endParaRPr lang="zh-CN" altLang="en-US"/>
+          </a:p>
+        </p:txBody>
+      </p:sp>
+      <p:cxnSp>
+        <p:nvCxnSpPr>
+          <p:cNvPr id="37" name="直接箭头连接符 36"/>
+          <p:cNvCxnSpPr/>
           <p:nvPr/>
-        </p:nvSpPr>
-        <p:spPr>
-          <a:xfrm>
-            <a:off x="1839595" y="447675"/>
-            <a:ext cx="1071880" cy="645160"/>
-          </a:xfrm>
-          <a:prstGeom prst="rect">
+        </p:nvCxnSpPr>
+        <p:spPr>
+          <a:xfrm flipV="1">
+            <a:off x="5094605" y="4985385"/>
+            <a:ext cx="280670" cy="0"/>
+          </a:xfrm>
+          <a:prstGeom prst="straightConnector1">
             <a:avLst/>
           </a:prstGeom>
-          <a:noFill/>
-        </p:spPr>
-        <p:txBody>
-          <a:bodyPr wrap="square" rtlCol="0">
-            <a:spAutoFit/>
-          </a:bodyPr>
-          <a:p>
-            <a:r>
-              <a:rPr lang="zh-CN" altLang="en-US"/>
-              <a:t>监控</a:t>
-            </a:r>
-            <a:r>
-              <a:rPr lang="en-US" altLang="zh-CN"/>
-              <a:t>/</a:t>
-            </a:r>
-            <a:r>
-              <a:rPr lang="zh-CN" altLang="en-US"/>
-              <a:t>离线配置</a:t>
-            </a:r>
-            <a:endParaRPr lang="zh-CN" altLang="en-US"/>
-          </a:p>
-        </p:txBody>
-      </p:sp>
-      <p:sp>
-        <p:nvSpPr>
-          <p:cNvPr id="38" name="右箭头 37"/>
-          <p:cNvSpPr/>
-          <p:nvPr/>
-        </p:nvSpPr>
-        <p:spPr>
-          <a:xfrm>
-            <a:off x="5043170" y="4850130"/>
-            <a:ext cx="568960" cy="583565"/>
-          </a:xfrm>
-          <a:prstGeom prst="rightArrow">
-            <a:avLst/>
-          </a:prstGeom>
-          <a:solidFill>
-            <a:schemeClr val="accent1">
-              <a:alpha val="64000"/>
-            </a:schemeClr>
-          </a:solidFill>
+          <a:ln w="22225">
+            <a:solidFill>
+              <a:schemeClr val="bg1">
+                <a:lumMod val="50000"/>
+              </a:schemeClr>
+            </a:solidFill>
+            <a:tailEnd type="triangle"/>
+          </a:ln>
         </p:spPr>
         <p:style>
           <a:lnRef idx="2">
-            <a:schemeClr val="accent1">
-              <a:lumMod val="75000"/>
-            </a:schemeClr>
+            <a:schemeClr val="accent1"/>
           </a:lnRef>
-          <a:fillRef idx="1">
-            <a:schemeClr val="accent1"/>
+          <a:fillRef idx="0">
+            <a:srgbClr val="FFFFFF"/>
           </a:fillRef>
           <a:effectRef idx="0">
             <a:srgbClr val="FFFFFF"/>
           </a:effectRef>
           <a:fontRef idx="minor">
-            <a:schemeClr val="lt1"/>
+            <a:schemeClr val="tx1"/>
           </a:fontRef>
         </p:style>
-        <p:txBody>
-          <a:bodyPr rtlCol="0" anchor="ctr"/>
-          <a:p>
-            <a:pPr algn="ctr"/>
-            <a:endParaRPr lang="zh-CN" altLang="en-US"/>
-          </a:p>
-        </p:txBody>
-      </p:sp>
+      </p:cxnSp>
     </p:spTree>
   </p:cSld>
   <p:clrMapOvr>
